--- a/report/20_题3_黄锦添.pptx
+++ b/report/20_题3_黄锦添.pptx
@@ -7156,7 +7156,7 @@
                 </a:solidFill>
                 <a:latin typeface="Microsoft YaHei"/>
               </a:rPr>
-              <a:t>代价：提前 26%–42% 的寿命</a:t>
+              <a:t>代价：提前 26.3%–41.6% 的寿命</a:t>
             </a:r>
           </a:p>
           <a:p>
